--- a/dist/초4/과학/생물과기체/초4_과학_생물과기체_01_생태계와먹이관계_학생용.pptx
+++ b/dist/초4/과학/생물과기체/초4_과학_생물과기체_01_생태계와먹이관계_학생용.pptx
@@ -122,13 +122,13 @@
   <p:extLst>
     <p:ext uri="{521415D9-36F7-43E2-AB2F-B90AF26B5E84}">
       <p14:sectionLst xmlns:p14="http://schemas.microsoft.com/office/powerpoint/2010/main">
-        <p14:section name="도입" id="{49bf98ce-df3d-e6ca-e24b-57d4bf5c5580}">
+        <p14:section name="도입" id="{e5507e3b-ad0c-07b8-074f-344583848ef5}">
           <p14:sldIdLst>
             <p14:sldId id="256"/>
             <p14:sldId id="257"/>
           </p14:sldIdLst>
         </p14:section>
-        <p14:section name="개념" id="{448ae2d0-2b3f-5a95-108c-500172f3332c}">
+        <p14:section name="개념" id="{119390c5-fb11-2b4f-25c3-9b84b814e1ca}">
           <p14:sldIdLst>
             <p14:sldId id="258"/>
             <p14:sldId id="259"/>
@@ -136,7 +136,7 @@
             <p14:sldId id="263"/>
           </p14:sldIdLst>
         </p14:section>
-        <p14:section name="연습" id="{8c93ea01-7a7c-4ecc-e45e-7fdbbde252fa}">
+        <p14:section name="연습" id="{bff30b61-259e-336d-ad92-4661f81bc80b}">
           <p14:sldIdLst>
             <p14:sldId id="260"/>
             <p14:sldId id="262"/>
@@ -146,30 +146,30 @@
             <p14:sldId id="267"/>
           </p14:sldIdLst>
         </p14:section>
-        <p14:section name="개념" id="{0e3b7520-052f-a8c8-906c-b50fb046fa96}">
+        <p14:section name="개념" id="{66adf861-fe64-bf98-1048-8b7d0a6625fb}">
           <p14:sldIdLst/>
         </p14:section>
-        <p14:section name="연습" id="{9145ef4a-954a-945b-3065-6e5a0998dd2d}">
+        <p14:section name="연습" id="{96553a7f-dacd-dc4e-c680-901e194601ae}">
           <p14:sldIdLst/>
         </p14:section>
-        <p14:section name="개념" id="{8d65ede0-a1e8-8615-097a-c50794145145}">
+        <p14:section name="개념" id="{5a624ec1-b3de-7f07-8cca-74be8e2507de}">
           <p14:sldIdLst/>
         </p14:section>
-        <p14:section name="연습" id="{8cd272cf-3c44-36fd-95bb-e5e1845c2f04}">
+        <p14:section name="연습" id="{e06650a2-38e2-6f8f-69f7-ab9655b77597}">
           <p14:sldIdLst/>
         </p14:section>
-        <p14:section name="확인" id="{cd17bf25-3859-74be-fc74-d8ba34fa454d}">
+        <p14:section name="확인" id="{d8ee8914-3682-cff8-f8d9-57b95bfe65ce}">
           <p14:sldIdLst>
             <p14:sldId id="268"/>
             <p14:sldId id="269"/>
           </p14:sldIdLst>
         </p14:section>
-        <p14:section name="정리" id="{71987d76-e6ff-ef57-ad6a-7189f6c20cde}">
+        <p14:section name="정리" id="{e2b3c124-3563-7515-ab23-226aaa8ee0c7}">
           <p14:sldIdLst>
             <p14:sldId id="270"/>
           </p14:sldIdLst>
         </p14:section>
-        <p14:section name="보충" id="{a4110517-e769-0ba8-ebfd-6c059ac25ded}">
+        <p14:section name="보충" id="{b18f5003-104c-d1bb-5fd1-99ee0993947e}">
           <p14:sldIdLst>
             <p14:sldId id="271"/>
           </p14:sldIdLst>
@@ -7252,7 +7252,7 @@
                 <a:ea typeface="맑은 고딕" pitchFamily="34" charset="-122"/>
                 <a:cs typeface="맑은 고딕" pitchFamily="34" charset="-120"/>
               </a:rPr>
-              <a:t>보충: 무엇을 먹고 살까?</a:t>
+              <a:t>보충: 무엇이 있어야 자랄까?</a:t>
             </a:r>
             <a:endParaRPr lang="ko-KR" sz="4000" dirty="0"/>
           </a:p>
@@ -7291,7 +7291,7 @@
                 <a:ea typeface="맑은 고딕" pitchFamily="34" charset="-122"/>
                 <a:cs typeface="맑은 고딕" pitchFamily="34" charset="-120"/>
               </a:rPr>
-              <a:t>동물은 다른 생물을 먹고 살아요.</a:t>
+              <a:t>식물과 동물이 자라는 데 필요한 것을 비교해요.</a:t>
             </a:r>
             <a:endParaRPr lang="ko-KR" sz="3000" dirty="0"/>
           </a:p>
@@ -7360,7 +7360,7 @@
                 <a:ea typeface="맑은 고딕" pitchFamily="34" charset="-122"/>
                 <a:cs typeface="맑은 고딕" pitchFamily="34" charset="-120"/>
               </a:rPr>
-              <a:t>식물은 다른 생물을 먹지 않고 스스로 양분을 만들어요.</a:t>
+              <a:t>식물은 다른 생물을 먹지 않고, 동물은 다른 생물을 먹어요.</a:t>
             </a:r>
             <a:endParaRPr lang="ko-KR" sz="3000" dirty="0"/>
           </a:p>
@@ -7381,16 +7381,16 @@
           </p:nvPr>
         </p:nvGraphicFramePr>
         <p:xfrm>
-          <a:off x="1979676" y="2284730"/>
-          <a:ext cx="8229600" cy="914400"/>
+          <a:off x="1522476" y="2284730"/>
+          <a:ext cx="9144000" cy="914400"/>
         </p:xfrm>
         <a:graphic>
           <a:graphicData uri="http://schemas.openxmlformats.org/drawingml/2006/table">
             <a:tbl>
               <a:tblPr/>
               <a:tblGrid>
-                <a:gridCol w="2880360"/>
-                <a:gridCol w="5349240"/>
+                <a:gridCol w="2743200"/>
+                <a:gridCol w="6400800"/>
               </a:tblGrid>
               <a:tr h="512572">
                 <a:tc>
@@ -7410,7 +7410,7 @@
                           <a:ea typeface="맑은 고딕" pitchFamily="34" charset="-122"/>
                           <a:cs typeface="맑은 고딕" pitchFamily="34" charset="-120"/>
                         </a:rPr>
-                        <a:t>동물</a:t>
+                        <a:t>생물</a:t>
                       </a:r>
                       <a:endParaRPr lang="en-US" sz="2600" dirty="0">
                         <a:latin typeface="맑은 고딕" charset="0"/>
@@ -7478,7 +7478,7 @@
                           <a:ea typeface="맑은 고딕" pitchFamily="34" charset="-122"/>
                           <a:cs typeface="맑은 고딕" pitchFamily="34" charset="-120"/>
                         </a:rPr>
-                        <a:t>먹이</a:t>
+                        <a:t>자라는 데 필요한 것</a:t>
                       </a:r>
                       <a:endParaRPr lang="en-US" sz="2600" dirty="0">
                         <a:latin typeface="맑은 고딕" charset="0"/>
@@ -7526,6 +7526,144 @@
                     </a:lnB>
                     <a:solidFill>
                       <a:srgbClr val="EAF3F1"/>
+                    </a:solidFill>
+                  </a:tcPr>
+                </a:tc>
+              </a:tr>
+              <a:tr h="512572">
+                <a:tc>
+                  <a:txBody>
+                    <a:bodyPr/>
+                    <a:lstStyle/>
+                    <a:p>
+                      <a:pPr eaLnBrk="0" algn="ctr" indent="0" marL="0">
+                        <a:buNone/>
+                      </a:pPr>
+                      <a:r>
+                        <a:rPr lang="en-US" sz="2600" dirty="0">
+                          <a:solidFill>
+                            <a:srgbClr val="1F2937"/>
+                          </a:solidFill>
+                          <a:latin typeface="맑은 고딕" pitchFamily="34" charset="0"/>
+                          <a:ea typeface="맑은 고딕" pitchFamily="34" charset="-122"/>
+                          <a:cs typeface="맑은 고딕" pitchFamily="34" charset="-120"/>
+                        </a:rPr>
+                        <a:t>강낭콩</a:t>
+                      </a:r>
+                      <a:endParaRPr lang="en-US" sz="2600" dirty="0">
+                        <a:latin typeface="맑은 고딕" charset="0"/>
+                        <a:ea typeface="맑은 고딕" charset="0"/>
+                        <a:cs typeface="맑은 고딕" charset="0"/>
+                      </a:endParaRPr>
+                    </a:p>
+                  </a:txBody>
+                  <a:tcPr marL="38100" marR="38100" marT="38100" marB="38100" anchor="ctr">
+                    <a:lnL w="12700" cap="flat" cmpd="sng" algn="ctr">
+                      <a:solidFill>
+                        <a:srgbClr val="94A3B8"/>
+                      </a:solidFill>
+                      <a:prstDash val="solid"/>
+                      <a:round/>
+                      <a:headEnd type="none" w="med" len="med"/>
+                      <a:tailEnd type="none" w="med" len="med"/>
+                    </a:lnL>
+                    <a:lnR w="12700" cap="flat" cmpd="sng" algn="ctr">
+                      <a:solidFill>
+                        <a:srgbClr val="94A3B8"/>
+                      </a:solidFill>
+                      <a:prstDash val="solid"/>
+                      <a:round/>
+                      <a:headEnd type="none" w="med" len="med"/>
+                      <a:tailEnd type="none" w="med" len="med"/>
+                    </a:lnR>
+                    <a:lnT w="12700" cap="flat" cmpd="sng" algn="ctr">
+                      <a:solidFill>
+                        <a:srgbClr val="94A3B8"/>
+                      </a:solidFill>
+                      <a:prstDash val="solid"/>
+                      <a:round/>
+                      <a:headEnd type="none" w="med" len="med"/>
+                      <a:tailEnd type="none" w="med" len="med"/>
+                    </a:lnT>
+                    <a:lnB w="12700" cap="flat" cmpd="sng" algn="ctr">
+                      <a:solidFill>
+                        <a:srgbClr val="94A3B8"/>
+                      </a:solidFill>
+                      <a:prstDash val="solid"/>
+                      <a:round/>
+                      <a:headEnd type="none" w="med" len="med"/>
+                      <a:tailEnd type="none" w="med" len="med"/>
+                    </a:lnB>
+                    <a:solidFill>
+                      <a:srgbClr val="FFFFFF"/>
+                    </a:solidFill>
+                  </a:tcPr>
+                </a:tc>
+                <a:tc>
+                  <a:txBody>
+                    <a:bodyPr/>
+                    <a:lstStyle/>
+                    <a:p>
+                      <a:pPr eaLnBrk="0" algn="ctr" indent="0" marL="0">
+                        <a:buNone/>
+                      </a:pPr>
+                      <a:r>
+                        <a:rPr lang="en-US" sz="2600" dirty="0">
+                          <a:solidFill>
+                            <a:srgbClr val="1F2937"/>
+                          </a:solidFill>
+                          <a:latin typeface="맑은 고딕" pitchFamily="34" charset="0"/>
+                          <a:ea typeface="맑은 고딕" pitchFamily="34" charset="-122"/>
+                          <a:cs typeface="맑은 고딕" pitchFamily="34" charset="-120"/>
+                        </a:rPr>
+                        <a:t>햇빛, 물, 알맞은 온도</a:t>
+                      </a:r>
+                      <a:endParaRPr lang="en-US" sz="2600" dirty="0">
+                        <a:latin typeface="맑은 고딕" charset="0"/>
+                        <a:ea typeface="맑은 고딕" charset="0"/>
+                        <a:cs typeface="맑은 고딕" charset="0"/>
+                      </a:endParaRPr>
+                    </a:p>
+                  </a:txBody>
+                  <a:tcPr marL="38100" marR="38100" marT="38100" marB="38100" anchor="ctr">
+                    <a:lnL w="12700" cap="flat" cmpd="sng" algn="ctr">
+                      <a:solidFill>
+                        <a:srgbClr val="94A3B8"/>
+                      </a:solidFill>
+                      <a:prstDash val="solid"/>
+                      <a:round/>
+                      <a:headEnd type="none" w="med" len="med"/>
+                      <a:tailEnd type="none" w="med" len="med"/>
+                    </a:lnL>
+                    <a:lnR w="12700" cap="flat" cmpd="sng" algn="ctr">
+                      <a:solidFill>
+                        <a:srgbClr val="94A3B8"/>
+                      </a:solidFill>
+                      <a:prstDash val="solid"/>
+                      <a:round/>
+                      <a:headEnd type="none" w="med" len="med"/>
+                      <a:tailEnd type="none" w="med" len="med"/>
+                    </a:lnR>
+                    <a:lnT w="12700" cap="flat" cmpd="sng" algn="ctr">
+                      <a:solidFill>
+                        <a:srgbClr val="94A3B8"/>
+                      </a:solidFill>
+                      <a:prstDash val="solid"/>
+                      <a:round/>
+                      <a:headEnd type="none" w="med" len="med"/>
+                      <a:tailEnd type="none" w="med" len="med"/>
+                    </a:lnT>
+                    <a:lnB w="12700" cap="flat" cmpd="sng" algn="ctr">
+                      <a:solidFill>
+                        <a:srgbClr val="94A3B8"/>
+                      </a:solidFill>
+                      <a:prstDash val="solid"/>
+                      <a:round/>
+                      <a:headEnd type="none" w="med" len="med"/>
+                      <a:tailEnd type="none" w="med" len="med"/>
+                    </a:lnB>
+                    <a:solidFill>
+                      <a:srgbClr val="FFFFFF"/>
                     </a:solidFill>
                   </a:tcPr>
                 </a:tc>
@@ -7616,145 +7754,7 @@
                           <a:ea typeface="맑은 고딕" pitchFamily="34" charset="-122"/>
                           <a:cs typeface="맑은 고딕" pitchFamily="34" charset="-120"/>
                         </a:rPr>
-                        <a:t>풀, 채소</a:t>
-                      </a:r>
-                      <a:endParaRPr lang="en-US" sz="2600" dirty="0">
-                        <a:latin typeface="맑은 고딕" charset="0"/>
-                        <a:ea typeface="맑은 고딕" charset="0"/>
-                        <a:cs typeface="맑은 고딕" charset="0"/>
-                      </a:endParaRPr>
-                    </a:p>
-                  </a:txBody>
-                  <a:tcPr marL="38100" marR="38100" marT="38100" marB="38100" anchor="ctr">
-                    <a:lnL w="12700" cap="flat" cmpd="sng" algn="ctr">
-                      <a:solidFill>
-                        <a:srgbClr val="94A3B8"/>
-                      </a:solidFill>
-                      <a:prstDash val="solid"/>
-                      <a:round/>
-                      <a:headEnd type="none" w="med" len="med"/>
-                      <a:tailEnd type="none" w="med" len="med"/>
-                    </a:lnL>
-                    <a:lnR w="12700" cap="flat" cmpd="sng" algn="ctr">
-                      <a:solidFill>
-                        <a:srgbClr val="94A3B8"/>
-                      </a:solidFill>
-                      <a:prstDash val="solid"/>
-                      <a:round/>
-                      <a:headEnd type="none" w="med" len="med"/>
-                      <a:tailEnd type="none" w="med" len="med"/>
-                    </a:lnR>
-                    <a:lnT w="12700" cap="flat" cmpd="sng" algn="ctr">
-                      <a:solidFill>
-                        <a:srgbClr val="94A3B8"/>
-                      </a:solidFill>
-                      <a:prstDash val="solid"/>
-                      <a:round/>
-                      <a:headEnd type="none" w="med" len="med"/>
-                      <a:tailEnd type="none" w="med" len="med"/>
-                    </a:lnT>
-                    <a:lnB w="12700" cap="flat" cmpd="sng" algn="ctr">
-                      <a:solidFill>
-                        <a:srgbClr val="94A3B8"/>
-                      </a:solidFill>
-                      <a:prstDash val="solid"/>
-                      <a:round/>
-                      <a:headEnd type="none" w="med" len="med"/>
-                      <a:tailEnd type="none" w="med" len="med"/>
-                    </a:lnB>
-                    <a:solidFill>
-                      <a:srgbClr val="FFFFFF"/>
-                    </a:solidFill>
-                  </a:tcPr>
-                </a:tc>
-              </a:tr>
-              <a:tr h="512572">
-                <a:tc>
-                  <a:txBody>
-                    <a:bodyPr/>
-                    <a:lstStyle/>
-                    <a:p>
-                      <a:pPr eaLnBrk="0" algn="ctr" indent="0" marL="0">
-                        <a:buNone/>
-                      </a:pPr>
-                      <a:r>
-                        <a:rPr lang="en-US" sz="2600" dirty="0">
-                          <a:solidFill>
-                            <a:srgbClr val="1F2937"/>
-                          </a:solidFill>
-                          <a:latin typeface="맑은 고딕" pitchFamily="34" charset="0"/>
-                          <a:ea typeface="맑은 고딕" pitchFamily="34" charset="-122"/>
-                          <a:cs typeface="맑은 고딕" pitchFamily="34" charset="-120"/>
-                        </a:rPr>
-                        <a:t>메뚜기</a:t>
-                      </a:r>
-                      <a:endParaRPr lang="en-US" sz="2600" dirty="0">
-                        <a:latin typeface="맑은 고딕" charset="0"/>
-                        <a:ea typeface="맑은 고딕" charset="0"/>
-                        <a:cs typeface="맑은 고딕" charset="0"/>
-                      </a:endParaRPr>
-                    </a:p>
-                  </a:txBody>
-                  <a:tcPr marL="38100" marR="38100" marT="38100" marB="38100" anchor="ctr">
-                    <a:lnL w="12700" cap="flat" cmpd="sng" algn="ctr">
-                      <a:solidFill>
-                        <a:srgbClr val="94A3B8"/>
-                      </a:solidFill>
-                      <a:prstDash val="solid"/>
-                      <a:round/>
-                      <a:headEnd type="none" w="med" len="med"/>
-                      <a:tailEnd type="none" w="med" len="med"/>
-                    </a:lnL>
-                    <a:lnR w="12700" cap="flat" cmpd="sng" algn="ctr">
-                      <a:solidFill>
-                        <a:srgbClr val="94A3B8"/>
-                      </a:solidFill>
-                      <a:prstDash val="solid"/>
-                      <a:round/>
-                      <a:headEnd type="none" w="med" len="med"/>
-                      <a:tailEnd type="none" w="med" len="med"/>
-                    </a:lnR>
-                    <a:lnT w="12700" cap="flat" cmpd="sng" algn="ctr">
-                      <a:solidFill>
-                        <a:srgbClr val="94A3B8"/>
-                      </a:solidFill>
-                      <a:prstDash val="solid"/>
-                      <a:round/>
-                      <a:headEnd type="none" w="med" len="med"/>
-                      <a:tailEnd type="none" w="med" len="med"/>
-                    </a:lnT>
-                    <a:lnB w="12700" cap="flat" cmpd="sng" algn="ctr">
-                      <a:solidFill>
-                        <a:srgbClr val="94A3B8"/>
-                      </a:solidFill>
-                      <a:prstDash val="solid"/>
-                      <a:round/>
-                      <a:headEnd type="none" w="med" len="med"/>
-                      <a:tailEnd type="none" w="med" len="med"/>
-                    </a:lnB>
-                    <a:solidFill>
-                      <a:srgbClr val="FFFFFF"/>
-                    </a:solidFill>
-                  </a:tcPr>
-                </a:tc>
-                <a:tc>
-                  <a:txBody>
-                    <a:bodyPr/>
-                    <a:lstStyle/>
-                    <a:p>
-                      <a:pPr eaLnBrk="0" algn="ctr" indent="0" marL="0">
-                        <a:buNone/>
-                      </a:pPr>
-                      <a:r>
-                        <a:rPr lang="en-US" sz="2600" dirty="0">
-                          <a:solidFill>
-                            <a:srgbClr val="1F2937"/>
-                          </a:solidFill>
-                          <a:latin typeface="맑은 고딕" pitchFamily="34" charset="0"/>
-                          <a:ea typeface="맑은 고딕" pitchFamily="34" charset="-122"/>
-                          <a:cs typeface="맑은 고딕" pitchFamily="34" charset="-120"/>
-                        </a:rPr>
-                        <a:t>벼, 풀의 잎</a:t>
+                        <a:t>풀, 채소를 먹어요</a:t>
                       </a:r>
                       <a:endParaRPr lang="en-US" sz="2600" dirty="0">
                         <a:latin typeface="맑은 고딕" charset="0"/>
@@ -7892,7 +7892,7 @@
                           <a:ea typeface="맑은 고딕" pitchFamily="34" charset="-122"/>
                           <a:cs typeface="맑은 고딕" pitchFamily="34" charset="-120"/>
                         </a:rPr>
-                        <a:t>파리, 메뚜기 같은 곤충</a:t>
+                        <a:t>메뚜기 같은 곤충을 먹어요</a:t>
                       </a:r>
                       <a:endParaRPr lang="en-US" sz="2600" dirty="0">
                         <a:latin typeface="맑은 고딕" charset="0"/>
@@ -8030,7 +8030,7 @@
                           <a:ea typeface="맑은 고딕" pitchFamily="34" charset="-122"/>
                           <a:cs typeface="맑은 고딕" pitchFamily="34" charset="-120"/>
                         </a:rPr>
-                        <a:t>곡식, 곤충</a:t>
+                        <a:t>곡식, 곤충을 먹어요</a:t>
                       </a:r>
                       <a:endParaRPr lang="en-US" sz="2600" dirty="0">
                         <a:latin typeface="맑은 고딕" charset="0"/>
@@ -8194,7 +8194,7 @@
                 <a:ea typeface="맑은 고딕" pitchFamily="34" charset="-122"/>
                 <a:cs typeface="맑은 고딕" pitchFamily="34" charset="-120"/>
               </a:rPr>
-              <a:t>먼저 떠올려요</a:t>
+              <a:t>3학년 기억하기</a:t>
             </a:r>
             <a:endParaRPr lang="ko-KR" sz="4000" dirty="0"/>
           </a:p>
@@ -8280,7 +8280,24 @@
                 <a:ea typeface="맑은 고딕" pitchFamily="34" charset="-122"/>
                 <a:cs typeface="맑은 고딕" pitchFamily="34" charset="-120"/>
               </a:rPr>
-              <a:t>태양계에서 가장 큰 행성은?</a:t>
+              <a:t>강낭콩의 한살이를</a:t>
+            </a:r>
+            <a:endParaRPr lang="ko-KR" sz="3000" dirty="0"/>
+          </a:p>
+          <a:p>
+            <a:pPr eaLnBrk="0" algn="l" indent="0" marL="0">
+              <a:buNone/>
+            </a:pPr>
+            <a:r>
+              <a:rPr lang="ko-KR" altLang="en-US" sz="3000" dirty="0">
+                <a:solidFill>
+                  <a:srgbClr val="1F2937"/>
+                </a:solidFill>
+                <a:latin typeface="맑은 고딕" pitchFamily="34" charset="0"/>
+                <a:ea typeface="맑은 고딕" pitchFamily="34" charset="-122"/>
+                <a:cs typeface="맑은 고딕" pitchFamily="34" charset="-120"/>
+              </a:rPr>
+              <a:t>차례대로 말해요.</a:t>
             </a:r>
             <a:endParaRPr lang="ko-KR" sz="3000" dirty="0"/>
           </a:p>
@@ -8366,7 +8383,24 @@
                 <a:ea typeface="맑은 고딕" pitchFamily="34" charset="-122"/>
                 <a:cs typeface="맑은 고딕" pitchFamily="34" charset="-120"/>
               </a:rPr>
-              <a:t>토끼는 무엇을 먹고 살까요?</a:t>
+              <a:t>강낭콩이 잘 자라려면</a:t>
+            </a:r>
+            <a:endParaRPr lang="ko-KR" sz="3000" dirty="0"/>
+          </a:p>
+          <a:p>
+            <a:pPr eaLnBrk="0" algn="l" indent="0" marL="0">
+              <a:buNone/>
+            </a:pPr>
+            <a:r>
+              <a:rPr lang="ko-KR" altLang="en-US" sz="3000" dirty="0">
+                <a:solidFill>
+                  <a:srgbClr val="1F2937"/>
+                </a:solidFill>
+                <a:latin typeface="맑은 고딕" pitchFamily="34" charset="0"/>
+                <a:ea typeface="맑은 고딕" pitchFamily="34" charset="-122"/>
+                <a:cs typeface="맑은 고딕" pitchFamily="34" charset="-120"/>
+              </a:rPr>
+              <a:t>무엇이 필요할까요?</a:t>
             </a:r>
             <a:endParaRPr lang="ko-KR" sz="3000" dirty="0"/>
           </a:p>
@@ -8452,7 +8486,24 @@
                 <a:ea typeface="맑은 고딕" pitchFamily="34" charset="-122"/>
                 <a:cs typeface="맑은 고딕" pitchFamily="34" charset="-120"/>
               </a:rPr>
-              <a:t>개구리는 무엇을 먹고 살까요?</a:t>
+              <a:t>토끼와 개구리는</a:t>
+            </a:r>
+            <a:endParaRPr lang="ko-KR" sz="3000" dirty="0"/>
+          </a:p>
+          <a:p>
+            <a:pPr eaLnBrk="0" algn="l" indent="0" marL="0">
+              <a:buNone/>
+            </a:pPr>
+            <a:r>
+              <a:rPr lang="ko-KR" altLang="en-US" sz="3000" dirty="0">
+                <a:solidFill>
+                  <a:srgbClr val="1F2937"/>
+                </a:solidFill>
+                <a:latin typeface="맑은 고딕" pitchFamily="34" charset="0"/>
+                <a:ea typeface="맑은 고딕" pitchFamily="34" charset="-122"/>
+                <a:cs typeface="맑은 고딕" pitchFamily="34" charset="-120"/>
+              </a:rPr>
+              <a:t>무엇을 먹고 살까요?</a:t>
             </a:r>
             <a:endParaRPr lang="ko-KR" sz="3000" dirty="0"/>
           </a:p>

--- a/dist/초4/과학/생물과기체/초4_과학_생물과기체_01_생태계와먹이관계_학생용.pptx
+++ b/dist/초4/과학/생물과기체/초4_과학_생물과기체_01_생태계와먹이관계_학생용.pptx
@@ -122,13 +122,13 @@
   <p:extLst>
     <p:ext uri="{521415D9-36F7-43E2-AB2F-B90AF26B5E84}">
       <p14:sectionLst xmlns:p14="http://schemas.microsoft.com/office/powerpoint/2010/main">
-        <p14:section name="도입" id="{e5507e3b-ad0c-07b8-074f-344583848ef5}">
+        <p14:section name="도입" id="{5a782ff7-ef96-465c-235e-f4f70ac275a6}">
           <p14:sldIdLst>
             <p14:sldId id="256"/>
             <p14:sldId id="257"/>
           </p14:sldIdLst>
         </p14:section>
-        <p14:section name="개념" id="{119390c5-fb11-2b4f-25c3-9b84b814e1ca}">
+        <p14:section name="개념" id="{53040e9b-c024-882e-a250-15e91eefbfca}">
           <p14:sldIdLst>
             <p14:sldId id="258"/>
             <p14:sldId id="259"/>
@@ -136,7 +136,7 @@
             <p14:sldId id="263"/>
           </p14:sldIdLst>
         </p14:section>
-        <p14:section name="연습" id="{bff30b61-259e-336d-ad92-4661f81bc80b}">
+        <p14:section name="연습" id="{730db9b8-4a50-2faf-a3a2-1d6801dc8591}">
           <p14:sldIdLst>
             <p14:sldId id="260"/>
             <p14:sldId id="262"/>
@@ -146,30 +146,30 @@
             <p14:sldId id="267"/>
           </p14:sldIdLst>
         </p14:section>
-        <p14:section name="개념" id="{66adf861-fe64-bf98-1048-8b7d0a6625fb}">
+        <p14:section name="개념" id="{dcf36b2b-daa1-e1c1-9054-37665b600ceb}">
           <p14:sldIdLst/>
         </p14:section>
-        <p14:section name="연습" id="{96553a7f-dacd-dc4e-c680-901e194601ae}">
+        <p14:section name="연습" id="{518d1ec2-1951-d75e-9850-200ce197f3ce}">
           <p14:sldIdLst/>
         </p14:section>
-        <p14:section name="개념" id="{5a624ec1-b3de-7f07-8cca-74be8e2507de}">
+        <p14:section name="개념" id="{131edf87-cd56-53c9-d993-0a55ec8f48a7}">
           <p14:sldIdLst/>
         </p14:section>
-        <p14:section name="연습" id="{e06650a2-38e2-6f8f-69f7-ab9655b77597}">
+        <p14:section name="연습" id="{0789a56e-929e-768a-2d49-3da751ad9001}">
           <p14:sldIdLst/>
         </p14:section>
-        <p14:section name="확인" id="{d8ee8914-3682-cff8-f8d9-57b95bfe65ce}">
+        <p14:section name="확인" id="{68160338-e550-e201-0525-29e41b2c34bc}">
           <p14:sldIdLst>
             <p14:sldId id="268"/>
             <p14:sldId id="269"/>
           </p14:sldIdLst>
         </p14:section>
-        <p14:section name="정리" id="{e2b3c124-3563-7515-ab23-226aaa8ee0c7}">
+        <p14:section name="정리" id="{3a42fb86-e98c-32b1-b66b-405054af6399}">
           <p14:sldIdLst>
             <p14:sldId id="270"/>
           </p14:sldIdLst>
         </p14:section>
-        <p14:section name="보충" id="{b18f5003-104c-d1bb-5fd1-99ee0993947e}">
+        <p14:section name="보충" id="{67c76cd9-93bf-a97d-1b0b-b813649e1746}">
           <p14:sldIdLst>
             <p14:sldId id="271"/>
           </p14:sldIdLst>
